--- a/business documents/Aplomb_Supplier_Shortlist_v1.pptx
+++ b/business documents/Aplomb_Supplier_Shortlist_v1.pptx
@@ -3941,7 +3941,7 @@
         </p:nvGraphicFramePr>
         <p:xfrm>
           <a:off x="548640" y="1965960"/>
-          <a:ext cx="11091669" cy="3200400"/>
+          <a:ext cx="11091667" cy="3200400"/>
         </p:xfrm>
         <a:graphic>
           <a:graphicData uri="http://schemas.openxmlformats.org/drawingml/2006/table">
@@ -3950,14 +3950,15 @@
                 <a:tableStyleId>{5C22544A-7EE6-4342-B048-85BDC9FD1C3A}</a:tableStyleId>
               </a:tblPr>
               <a:tblGrid>
-                <a:gridCol w="1201597"/>
+                <a:gridCol w="1016736"/>
+                <a:gridCol w="1109167"/>
+                <a:gridCol w="1663750"/>
                 <a:gridCol w="1432674"/>
-                <a:gridCol w="1894827"/>
+                <a:gridCol w="508368"/>
+                <a:gridCol w="693229"/>
+                <a:gridCol w="878090"/>
                 <a:gridCol w="600798"/>
-                <a:gridCol w="785660"/>
-                <a:gridCol w="924306"/>
-                <a:gridCol w="693229"/>
-                <a:gridCol w="3558578"/>
+                <a:gridCol w="3188855"/>
               </a:tblGrid>
               <a:tr h="800100">
                 <a:tc>
@@ -4032,6 +4033,33 @@
                           <a:latin typeface="IBM Plex Sans"/>
                         </a:rPr>
                         <a:t>Product</a:t>
+                      </a:r>
+                    </a:p>
+                  </a:txBody>
+                  <a:tcPr>
+                    <a:solidFill>
+                      <a:srgbClr val="1A1512"/>
+                    </a:solidFill>
+                  </a:tcPr>
+                </a:tc>
+                <a:tc>
+                  <a:txBody>
+                    <a:bodyPr lIns="45000" rIns="45000" tIns="40000" bIns="40000" wrap="square"/>
+                    <a:lstStyle/>
+                    <a:p>
+                      <a:pPr algn="l">
+                        <a:lnSpc>
+                          <a:spcPct val="112000"/>
+                        </a:lnSpc>
+                      </a:pPr>
+                      <a:r>
+                        <a:rPr sz="850" b="1">
+                          <a:solidFill>
+                            <a:srgbClr val="EFE8DC"/>
+                          </a:solidFill>
+                          <a:latin typeface="IBM Plex Sans"/>
+                        </a:rPr>
+                        <a:t>Product page</a:t>
                       </a:r>
                     </a:p>
                   </a:txBody>
@@ -4223,7 +4251,7 @@
                           <a:latin typeface="IBM Plex Sans"/>
                           <a:hlinkClick r:id="rId2"/>
                         </a:rPr>
-                        <a:t>ingpharmaceutical.com/prod…</a:t>
+                        <a:t>ingpharmaceutical.com</a:t>
                       </a:r>
                     </a:p>
                   </a:txBody>
@@ -4244,13 +4272,41 @@
                         </a:lnSpc>
                       </a:pPr>
                       <a:r>
-                        <a:rPr sz="800" b="0">
+                        <a:rPr sz="750" b="0">
                           <a:solidFill>
                             <a:srgbClr val="1A1512"/>
                           </a:solidFill>
                           <a:latin typeface="IBM Plex Sans"/>
                         </a:rPr>
                         <a:t>Nausea Relief Softgel — Ginger Root 67mg + B6 1.4mg + Mg carbonate (ready formula)</a:t>
+                      </a:r>
+                    </a:p>
+                  </a:txBody>
+                  <a:tcPr>
+                    <a:solidFill>
+                      <a:srgbClr val="EFE8DC"/>
+                    </a:solidFill>
+                  </a:tcPr>
+                </a:tc>
+                <a:tc>
+                  <a:txBody>
+                    <a:bodyPr lIns="45000" rIns="45000" tIns="40000" bIns="40000" wrap="square"/>
+                    <a:lstStyle/>
+                    <a:p>
+                      <a:pPr algn="l">
+                        <a:lnSpc>
+                          <a:spcPct val="112000"/>
+                        </a:lnSpc>
+                      </a:pPr>
+                      <a:r>
+                        <a:rPr sz="800" b="0" u="sng">
+                          <a:solidFill>
+                            <a:srgbClr val="7A3D14"/>
+                          </a:solidFill>
+                          <a:latin typeface="IBM Plex Sans"/>
+                          <a:hlinkClick r:id="rId3"/>
+                        </a:rPr>
+                        <a:t>Nausea Relief Softgel</a:t>
                       </a:r>
                     </a:p>
                   </a:txBody>
@@ -4440,7 +4496,7 @@
                             <a:srgbClr val="7A3D14"/>
                           </a:solidFill>
                           <a:latin typeface="IBM Plex Sans"/>
-                          <a:hlinkClick r:id="rId3"/>
+                          <a:hlinkClick r:id="rId4"/>
                         </a:rPr>
                         <a:t>alibaba.com/showroom/ginge…</a:t>
                       </a:r>
@@ -4463,13 +4519,41 @@
                         </a:lnSpc>
                       </a:pPr>
                       <a:r>
-                        <a:rPr sz="800" b="0">
+                        <a:rPr sz="750" b="0">
                           <a:solidFill>
                             <a:srgbClr val="1A1512"/>
                           </a:solidFill>
                           <a:latin typeface="IBM Plex Sans"/>
                         </a:rPr>
                         <a:t>Vietnamese ginger candy chew, private-label wrap; B6 add-on possible on custom run</a:t>
+                      </a:r>
+                    </a:p>
+                  </a:txBody>
+                  <a:tcPr>
+                    <a:solidFill>
+                      <a:srgbClr val="F7F1E6"/>
+                    </a:solidFill>
+                  </a:tcPr>
+                </a:tc>
+                <a:tc>
+                  <a:txBody>
+                    <a:bodyPr lIns="45000" rIns="45000" tIns="40000" bIns="40000" wrap="square"/>
+                    <a:lstStyle/>
+                    <a:p>
+                      <a:pPr algn="l">
+                        <a:lnSpc>
+                          <a:spcPct val="112000"/>
+                        </a:lnSpc>
+                      </a:pPr>
+                      <a:r>
+                        <a:rPr sz="800" b="0" u="sng">
+                          <a:solidFill>
+                            <a:srgbClr val="7A3D14"/>
+                          </a:solidFill>
+                          <a:latin typeface="IBM Plex Sans"/>
+                          <a:hlinkClick r:id="rId4"/>
+                        </a:rPr>
+                        <a:t>Gingerbon Candy Wholesale</a:t>
                       </a:r>
                     </a:p>
                   </a:txBody>
@@ -4659,7 +4743,7 @@
                             <a:srgbClr val="7A3D14"/>
                           </a:solidFill>
                           <a:latin typeface="IBM Plex Sans"/>
-                          <a:hlinkClick r:id="rId4"/>
+                          <a:hlinkClick r:id="rId5"/>
                         </a:rPr>
                         <a:t>alibaba.com/showroom/ginge…</a:t>
                       </a:r>
@@ -4682,13 +4766,41 @@
                         </a:lnSpc>
                       </a:pPr>
                       <a:r>
-                        <a:rPr sz="800" b="0">
+                        <a:rPr sz="750" b="0">
                           <a:solidFill>
                             <a:srgbClr val="1A1512"/>
                           </a:solidFill>
                           <a:latin typeface="IBM Plex Sans"/>
                         </a:rPr>
                         <a:t>Private-label ginger chew, custom B6 + ginger blend; 66 suppliers in category</a:t>
+                      </a:r>
+                    </a:p>
+                  </a:txBody>
+                  <a:tcPr>
+                    <a:solidFill>
+                      <a:srgbClr val="EFE8DC"/>
+                    </a:solidFill>
+                  </a:tcPr>
+                </a:tc>
+                <a:tc>
+                  <a:txBody>
+                    <a:bodyPr lIns="45000" rIns="45000" tIns="40000" bIns="40000" wrap="square"/>
+                    <a:lstStyle/>
+                    <a:p>
+                      <a:pPr algn="l">
+                        <a:lnSpc>
+                          <a:spcPct val="112000"/>
+                        </a:lnSpc>
+                      </a:pPr>
+                      <a:r>
+                        <a:rPr sz="800" b="0" u="sng">
+                          <a:solidFill>
+                            <a:srgbClr val="7A3D14"/>
+                          </a:solidFill>
+                          <a:latin typeface="IBM Plex Sans"/>
+                          <a:hlinkClick r:id="rId5"/>
+                        </a:rPr>
+                        <a:t>Ginger Chew OEM Listings</a:t>
                       </a:r>
                     </a:p>
                   </a:txBody>
@@ -6292,7 +6404,7 @@
         </p:nvGraphicFramePr>
         <p:xfrm>
           <a:off x="548640" y="1965960"/>
-          <a:ext cx="11091669" cy="3200400"/>
+          <a:ext cx="11091667" cy="3200400"/>
         </p:xfrm>
         <a:graphic>
           <a:graphicData uri="http://schemas.openxmlformats.org/drawingml/2006/table">
@@ -6301,14 +6413,15 @@
                 <a:tableStyleId>{5C22544A-7EE6-4342-B048-85BDC9FD1C3A}</a:tableStyleId>
               </a:tblPr>
               <a:tblGrid>
-                <a:gridCol w="1201597"/>
+                <a:gridCol w="1016736"/>
+                <a:gridCol w="1109167"/>
+                <a:gridCol w="1663750"/>
                 <a:gridCol w="1432674"/>
-                <a:gridCol w="1894827"/>
+                <a:gridCol w="508368"/>
+                <a:gridCol w="693229"/>
+                <a:gridCol w="878090"/>
                 <a:gridCol w="600798"/>
-                <a:gridCol w="785660"/>
-                <a:gridCol w="924306"/>
-                <a:gridCol w="693229"/>
-                <a:gridCol w="3558578"/>
+                <a:gridCol w="3188855"/>
               </a:tblGrid>
               <a:tr h="800100">
                 <a:tc>
@@ -6383,6 +6496,33 @@
                           <a:latin typeface="IBM Plex Sans"/>
                         </a:rPr>
                         <a:t>Product</a:t>
+                      </a:r>
+                    </a:p>
+                  </a:txBody>
+                  <a:tcPr>
+                    <a:solidFill>
+                      <a:srgbClr val="1A1512"/>
+                    </a:solidFill>
+                  </a:tcPr>
+                </a:tc>
+                <a:tc>
+                  <a:txBody>
+                    <a:bodyPr lIns="45000" rIns="45000" tIns="40000" bIns="40000" wrap="square"/>
+                    <a:lstStyle/>
+                    <a:p>
+                      <a:pPr algn="l">
+                        <a:lnSpc>
+                          <a:spcPct val="112000"/>
+                        </a:lnSpc>
+                      </a:pPr>
+                      <a:r>
+                        <a:rPr sz="850" b="1">
+                          <a:solidFill>
+                            <a:srgbClr val="EFE8DC"/>
+                          </a:solidFill>
+                          <a:latin typeface="IBM Plex Sans"/>
+                        </a:rPr>
+                        <a:t>Product page</a:t>
                       </a:r>
                     </a:p>
                   </a:txBody>
@@ -6595,13 +6735,41 @@
                         </a:lnSpc>
                       </a:pPr>
                       <a:r>
-                        <a:rPr sz="800" b="0">
+                        <a:rPr sz="750" b="0">
                           <a:solidFill>
                             <a:srgbClr val="1A1512"/>
                           </a:solidFill>
                           <a:latin typeface="IBM Plex Sans"/>
                         </a:rPr>
                         <a:t>OEM multivitamin capsule (B12, Mg-glycinate, K2 MK-7, D3, B-complex blend)</a:t>
+                      </a:r>
+                    </a:p>
+                  </a:txBody>
+                  <a:tcPr>
+                    <a:solidFill>
+                      <a:srgbClr val="EFE8DC"/>
+                    </a:solidFill>
+                  </a:tcPr>
+                </a:tc>
+                <a:tc>
+                  <a:txBody>
+                    <a:bodyPr lIns="45000" rIns="45000" tIns="40000" bIns="40000" wrap="square"/>
+                    <a:lstStyle/>
+                    <a:p>
+                      <a:pPr algn="l">
+                        <a:lnSpc>
+                          <a:spcPct val="112000"/>
+                        </a:lnSpc>
+                      </a:pPr>
+                      <a:r>
+                        <a:rPr sz="800" b="0" u="sng">
+                          <a:solidFill>
+                            <a:srgbClr val="7A3D14"/>
+                          </a:solidFill>
+                          <a:latin typeface="IBM Plex Sans"/>
+                          <a:hlinkClick r:id="rId3"/>
+                        </a:rPr>
+                        <a:t>Vitamin &amp; Amino Acid Series</a:t>
                       </a:r>
                     </a:p>
                   </a:txBody>
@@ -6791,7 +6959,7 @@
                             <a:srgbClr val="7A3D14"/>
                           </a:solidFill>
                           <a:latin typeface="IBM Plex Sans"/>
-                          <a:hlinkClick r:id="rId3"/>
+                          <a:hlinkClick r:id="rId4"/>
                         </a:rPr>
                         <a:t>nutribl.com</a:t>
                       </a:r>
@@ -6814,13 +6982,41 @@
                         </a:lnSpc>
                       </a:pPr>
                       <a:r>
-                        <a:rPr sz="800" b="0">
+                        <a:rPr sz="750" b="0">
                           <a:solidFill>
                             <a:srgbClr val="1A1512"/>
                           </a:solidFill>
                           <a:latin typeface="IBM Plex Sans"/>
                         </a:rPr>
                         <a:t>Stock multivitamin capsule (120+ blends with B-complex, Mg, D3); private label</a:t>
+                      </a:r>
+                    </a:p>
+                  </a:txBody>
+                  <a:tcPr>
+                    <a:solidFill>
+                      <a:srgbClr val="F7F1E6"/>
+                    </a:solidFill>
+                  </a:tcPr>
+                </a:tc>
+                <a:tc>
+                  <a:txBody>
+                    <a:bodyPr lIns="45000" rIns="45000" tIns="40000" bIns="40000" wrap="square"/>
+                    <a:lstStyle/>
+                    <a:p>
+                      <a:pPr algn="l">
+                        <a:lnSpc>
+                          <a:spcPct val="112000"/>
+                        </a:lnSpc>
+                      </a:pPr>
+                      <a:r>
+                        <a:rPr sz="800" b="0" u="sng">
+                          <a:solidFill>
+                            <a:srgbClr val="7A3D14"/>
+                          </a:solidFill>
+                          <a:latin typeface="IBM Plex Sans"/>
+                          <a:hlinkClick r:id="rId5"/>
+                        </a:rPr>
+                        <a:t>Vitamin B-Complex Daily 120ct</a:t>
                       </a:r>
                     </a:p>
                   </a:txBody>
@@ -7010,7 +7206,7 @@
                             <a:srgbClr val="7A3D14"/>
                           </a:solidFill>
                           <a:latin typeface="IBM Plex Sans"/>
-                          <a:hlinkClick r:id="rId4"/>
+                          <a:hlinkClick r:id="rId6"/>
                         </a:rPr>
                         <a:t>customnutra.com</a:t>
                       </a:r>
@@ -7033,13 +7229,41 @@
                         </a:lnSpc>
                       </a:pPr>
                       <a:r>
-                        <a:rPr sz="800" b="0">
+                        <a:rPr sz="750" b="0">
                           <a:solidFill>
                             <a:srgbClr val="1A1512"/>
                           </a:solidFill>
                           <a:latin typeface="IBM Plex Sans"/>
                         </a:rPr>
                         <a:t>Multivitamin capsule (250+ stock blends incl. B-complex + Mg + electrolytes)</a:t>
+                      </a:r>
+                    </a:p>
+                  </a:txBody>
+                  <a:tcPr>
+                    <a:solidFill>
+                      <a:srgbClr val="EFE8DC"/>
+                    </a:solidFill>
+                  </a:tcPr>
+                </a:tc>
+                <a:tc>
+                  <a:txBody>
+                    <a:bodyPr lIns="45000" rIns="45000" tIns="40000" bIns="40000" wrap="square"/>
+                    <a:lstStyle/>
+                    <a:p>
+                      <a:pPr algn="l">
+                        <a:lnSpc>
+                          <a:spcPct val="112000"/>
+                        </a:lnSpc>
+                      </a:pPr>
+                      <a:r>
+                        <a:rPr sz="800" b="0" u="sng">
+                          <a:solidFill>
+                            <a:srgbClr val="7A3D14"/>
+                          </a:solidFill>
+                          <a:latin typeface="IBM Plex Sans"/>
+                          <a:hlinkClick r:id="rId7"/>
+                        </a:rPr>
+                        <a:t>Multivitamins PL Catalog</a:t>
                       </a:r>
                     </a:p>
                   </a:txBody>
@@ -10585,7 +10809,7 @@
         </p:nvGraphicFramePr>
         <p:xfrm>
           <a:off x="548640" y="1965960"/>
-          <a:ext cx="11091669" cy="3200400"/>
+          <a:ext cx="11091667" cy="3200400"/>
         </p:xfrm>
         <a:graphic>
           <a:graphicData uri="http://schemas.openxmlformats.org/drawingml/2006/table">
@@ -10594,14 +10818,15 @@
                 <a:tableStyleId>{5C22544A-7EE6-4342-B048-85BDC9FD1C3A}</a:tableStyleId>
               </a:tblPr>
               <a:tblGrid>
-                <a:gridCol w="1201597"/>
+                <a:gridCol w="1016736"/>
+                <a:gridCol w="1109167"/>
+                <a:gridCol w="1663750"/>
                 <a:gridCol w="1432674"/>
-                <a:gridCol w="1894827"/>
+                <a:gridCol w="508368"/>
+                <a:gridCol w="693229"/>
+                <a:gridCol w="878090"/>
                 <a:gridCol w="600798"/>
-                <a:gridCol w="785660"/>
-                <a:gridCol w="924306"/>
-                <a:gridCol w="693229"/>
-                <a:gridCol w="3558578"/>
+                <a:gridCol w="3188855"/>
               </a:tblGrid>
               <a:tr h="800100">
                 <a:tc>
@@ -10676,6 +10901,33 @@
                           <a:latin typeface="IBM Plex Sans"/>
                         </a:rPr>
                         <a:t>Product</a:t>
+                      </a:r>
+                    </a:p>
+                  </a:txBody>
+                  <a:tcPr>
+                    <a:solidFill>
+                      <a:srgbClr val="1A1512"/>
+                    </a:solidFill>
+                  </a:tcPr>
+                </a:tc>
+                <a:tc>
+                  <a:txBody>
+                    <a:bodyPr lIns="45000" rIns="45000" tIns="40000" bIns="40000" wrap="square"/>
+                    <a:lstStyle/>
+                    <a:p>
+                      <a:pPr algn="l">
+                        <a:lnSpc>
+                          <a:spcPct val="112000"/>
+                        </a:lnSpc>
+                      </a:pPr>
+                      <a:r>
+                        <a:rPr sz="850" b="1">
+                          <a:solidFill>
+                            <a:srgbClr val="EFE8DC"/>
+                          </a:solidFill>
+                          <a:latin typeface="IBM Plex Sans"/>
+                        </a:rPr>
+                        <a:t>Product page</a:t>
                       </a:r>
                     </a:p>
                   </a:txBody>
@@ -10888,13 +11140,41 @@
                         </a:lnSpc>
                       </a:pPr>
                       <a:r>
-                        <a:rPr sz="800" b="0">
+                        <a:rPr sz="750" b="0">
                           <a:solidFill>
                             <a:srgbClr val="1A1512"/>
                           </a:solidFill>
                           <a:latin typeface="IBM Plex Sans"/>
                         </a:rPr>
                         <a:t>Peptide serum w/ Matrixyl 3000 + Synthe'6, shelf-ready, dropper-bottle filled</a:t>
+                      </a:r>
+                    </a:p>
+                  </a:txBody>
+                  <a:tcPr>
+                    <a:solidFill>
+                      <a:srgbClr val="EFE8DC"/>
+                    </a:solidFill>
+                  </a:tcPr>
+                </a:tc>
+                <a:tc>
+                  <a:txBody>
+                    <a:bodyPr lIns="45000" rIns="45000" tIns="40000" bIns="40000" wrap="square"/>
+                    <a:lstStyle/>
+                    <a:p>
+                      <a:pPr algn="l">
+                        <a:lnSpc>
+                          <a:spcPct val="112000"/>
+                        </a:lnSpc>
+                      </a:pPr>
+                      <a:r>
+                        <a:rPr sz="800" b="0" u="sng">
+                          <a:solidFill>
+                            <a:srgbClr val="7A3D14"/>
+                          </a:solidFill>
+                          <a:latin typeface="IBM Plex Sans"/>
+                          <a:hlinkClick r:id="rId3"/>
+                        </a:rPr>
+                        <a:t>Anti-Age Peptide Serum</a:t>
                       </a:r>
                     </a:p>
                   </a:txBody>
@@ -11084,7 +11364,7 @@
                             <a:srgbClr val="7A3D14"/>
                           </a:solidFill>
                           <a:latin typeface="IBM Plex Sans"/>
-                          <a:hlinkClick r:id="rId3"/>
+                          <a:hlinkClick r:id="rId4"/>
                         </a:rPr>
                         <a:t>atalieneskincare.com</a:t>
                       </a:r>
@@ -11107,13 +11387,41 @@
                         </a:lnSpc>
                       </a:pPr>
                       <a:r>
-                        <a:rPr sz="800" b="0">
+                        <a:rPr sz="750" b="0">
                           <a:solidFill>
                             <a:srgbClr val="1A1512"/>
                           </a:solidFill>
                           <a:latin typeface="IBM Plex Sans"/>
                         </a:rPr>
                         <a:t>4-peptide anti-aging serum + HA + botanicals; USA-filled, esthetician-grade</a:t>
+                      </a:r>
+                    </a:p>
+                  </a:txBody>
+                  <a:tcPr>
+                    <a:solidFill>
+                      <a:srgbClr val="F7F1E6"/>
+                    </a:solidFill>
+                  </a:tcPr>
+                </a:tc>
+                <a:tc>
+                  <a:txBody>
+                    <a:bodyPr lIns="45000" rIns="45000" tIns="40000" bIns="40000" wrap="square"/>
+                    <a:lstStyle/>
+                    <a:p>
+                      <a:pPr algn="l">
+                        <a:lnSpc>
+                          <a:spcPct val="112000"/>
+                        </a:lnSpc>
+                      </a:pPr>
+                      <a:r>
+                        <a:rPr sz="800" b="0" u="sng">
+                          <a:solidFill>
+                            <a:srgbClr val="7A3D14"/>
+                          </a:solidFill>
+                          <a:latin typeface="IBM Plex Sans"/>
+                          <a:hlinkClick r:id="rId5"/>
+                        </a:rPr>
+                        <a:t>Plant-EGF Peptide + HA Serum</a:t>
                       </a:r>
                     </a:p>
                   </a:txBody>
@@ -11303,7 +11611,7 @@
                             <a:srgbClr val="7A3D14"/>
                           </a:solidFill>
                           <a:latin typeface="IBM Plex Sans"/>
-                          <a:hlinkClick r:id="rId4"/>
+                          <a:hlinkClick r:id="rId6"/>
                         </a:rPr>
                         <a:t>pravadaprivatelabel.com</a:t>
                       </a:r>
@@ -11326,13 +11634,41 @@
                         </a:lnSpc>
                       </a:pPr>
                       <a:r>
-                        <a:rPr sz="800" b="0">
+                        <a:rPr sz="750" b="0">
                           <a:solidFill>
                             <a:srgbClr val="1A1512"/>
                           </a:solidFill>
                           <a:latin typeface="IBM Plex Sans"/>
                         </a:rPr>
                         <a:t>Peptide+ Firming Serum (5 unnamed peptides); 70% organic; R&amp;D customization</a:t>
+                      </a:r>
+                    </a:p>
+                  </a:txBody>
+                  <a:tcPr>
+                    <a:solidFill>
+                      <a:srgbClr val="EFE8DC"/>
+                    </a:solidFill>
+                  </a:tcPr>
+                </a:tc>
+                <a:tc>
+                  <a:txBody>
+                    <a:bodyPr lIns="45000" rIns="45000" tIns="40000" bIns="40000" wrap="square"/>
+                    <a:lstStyle/>
+                    <a:p>
+                      <a:pPr algn="l">
+                        <a:lnSpc>
+                          <a:spcPct val="112000"/>
+                        </a:lnSpc>
+                      </a:pPr>
+                      <a:r>
+                        <a:rPr sz="800" b="0" u="sng">
+                          <a:solidFill>
+                            <a:srgbClr val="7A3D14"/>
+                          </a:solidFill>
+                          <a:latin typeface="IBM Plex Sans"/>
+                          <a:hlinkClick r:id="rId7"/>
+                        </a:rPr>
+                        <a:t>Peptide Complex Serum</a:t>
                       </a:r>
                     </a:p>
                   </a:txBody>
@@ -12936,7 +13272,7 @@
         </p:nvGraphicFramePr>
         <p:xfrm>
           <a:off x="548640" y="1965960"/>
-          <a:ext cx="11091669" cy="3200400"/>
+          <a:ext cx="11091667" cy="3200400"/>
         </p:xfrm>
         <a:graphic>
           <a:graphicData uri="http://schemas.openxmlformats.org/drawingml/2006/table">
@@ -12945,14 +13281,15 @@
                 <a:tableStyleId>{5C22544A-7EE6-4342-B048-85BDC9FD1C3A}</a:tableStyleId>
               </a:tblPr>
               <a:tblGrid>
-                <a:gridCol w="1201597"/>
+                <a:gridCol w="1016736"/>
+                <a:gridCol w="1109167"/>
+                <a:gridCol w="1663750"/>
                 <a:gridCol w="1432674"/>
-                <a:gridCol w="1894827"/>
+                <a:gridCol w="508368"/>
+                <a:gridCol w="693229"/>
+                <a:gridCol w="878090"/>
                 <a:gridCol w="600798"/>
-                <a:gridCol w="785660"/>
-                <a:gridCol w="924306"/>
-                <a:gridCol w="693229"/>
-                <a:gridCol w="3558578"/>
+                <a:gridCol w="3188855"/>
               </a:tblGrid>
               <a:tr h="800100">
                 <a:tc>
@@ -13027,6 +13364,33 @@
                           <a:latin typeface="IBM Plex Sans"/>
                         </a:rPr>
                         <a:t>Product</a:t>
+                      </a:r>
+                    </a:p>
+                  </a:txBody>
+                  <a:tcPr>
+                    <a:solidFill>
+                      <a:srgbClr val="1A1512"/>
+                    </a:solidFill>
+                  </a:tcPr>
+                </a:tc>
+                <a:tc>
+                  <a:txBody>
+                    <a:bodyPr lIns="45000" rIns="45000" tIns="40000" bIns="40000" wrap="square"/>
+                    <a:lstStyle/>
+                    <a:p>
+                      <a:pPr algn="l">
+                        <a:lnSpc>
+                          <a:spcPct val="112000"/>
+                        </a:lnSpc>
+                      </a:pPr>
+                      <a:r>
+                        <a:rPr sz="850" b="1">
+                          <a:solidFill>
+                            <a:srgbClr val="EFE8DC"/>
+                          </a:solidFill>
+                          <a:latin typeface="IBM Plex Sans"/>
+                        </a:rPr>
+                        <a:t>Product page</a:t>
                       </a:r>
                     </a:p>
                   </a:txBody>
@@ -13239,13 +13603,41 @@
                         </a:lnSpc>
                       </a:pPr>
                       <a:r>
-                        <a:rPr sz="800" b="0">
+                        <a:rPr sz="750" b="0">
                           <a:solidFill>
                             <a:srgbClr val="1A1512"/>
                           </a:solidFill>
                           <a:latin typeface="IBM Plex Sans"/>
                         </a:rPr>
                         <a:t>Custom zinc + xylitol lozenge — 35-yr US lozenge CDMO; cGMP; PA-based</a:t>
+                      </a:r>
+                    </a:p>
+                  </a:txBody>
+                  <a:tcPr>
+                    <a:solidFill>
+                      <a:srgbClr val="EFE8DC"/>
+                    </a:solidFill>
+                  </a:tcPr>
+                </a:tc>
+                <a:tc>
+                  <a:txBody>
+                    <a:bodyPr lIns="45000" rIns="45000" tIns="40000" bIns="40000" wrap="square"/>
+                    <a:lstStyle/>
+                    <a:p>
+                      <a:pPr algn="l">
+                        <a:lnSpc>
+                          <a:spcPct val="112000"/>
+                        </a:lnSpc>
+                      </a:pPr>
+                      <a:r>
+                        <a:rPr sz="800" b="0" u="sng">
+                          <a:solidFill>
+                            <a:srgbClr val="7A3D14"/>
+                          </a:solidFill>
+                          <a:latin typeface="IBM Plex Sans"/>
+                          <a:hlinkClick r:id="rId3"/>
+                        </a:rPr>
+                        <a:t>Lozenge CDMO Capabilities</a:t>
                       </a:r>
                     </a:p>
                   </a:txBody>
@@ -13435,7 +13827,7 @@
                             <a:srgbClr val="7A3D14"/>
                           </a:solidFill>
                           <a:latin typeface="IBM Plex Sans"/>
-                          <a:hlinkClick r:id="rId3"/>
+                          <a:hlinkClick r:id="rId4"/>
                         </a:rPr>
                         <a:t>alibaba.com/showroom/oral-…</a:t>
                       </a:r>
@@ -13458,13 +13850,41 @@
                         </a:lnSpc>
                       </a:pPr>
                       <a:r>
-                        <a:rPr sz="800" b="0">
+                        <a:rPr sz="750" b="0">
                           <a:solidFill>
                             <a:srgbClr val="1A1512"/>
                           </a:solidFill>
                           <a:latin typeface="IBM Plex Sans"/>
                         </a:rPr>
                         <a:t>OEM zinc lozenge / xylitol mint, private-label packaging</a:t>
+                      </a:r>
+                    </a:p>
+                  </a:txBody>
+                  <a:tcPr>
+                    <a:solidFill>
+                      <a:srgbClr val="F7F1E6"/>
+                    </a:solidFill>
+                  </a:tcPr>
+                </a:tc>
+                <a:tc>
+                  <a:txBody>
+                    <a:bodyPr lIns="45000" rIns="45000" tIns="40000" bIns="40000" wrap="square"/>
+                    <a:lstStyle/>
+                    <a:p>
+                      <a:pPr algn="l">
+                        <a:lnSpc>
+                          <a:spcPct val="112000"/>
+                        </a:lnSpc>
+                      </a:pPr>
+                      <a:r>
+                        <a:rPr sz="800" b="0" u="sng">
+                          <a:solidFill>
+                            <a:srgbClr val="7A3D14"/>
+                          </a:solidFill>
+                          <a:latin typeface="IBM Plex Sans"/>
+                          <a:hlinkClick r:id="rId5"/>
+                        </a:rPr>
+                        <a:t>Oral Care OEM Listings</a:t>
                       </a:r>
                     </a:p>
                   </a:txBody>
@@ -13654,7 +14074,7 @@
                             <a:srgbClr val="7A3D14"/>
                           </a:solidFill>
                           <a:latin typeface="IBM Plex Sans"/>
-                          <a:hlinkClick r:id="rId4"/>
+                          <a:hlinkClick r:id="rId6"/>
                         </a:rPr>
                         <a:t>alibaba.com/supplier/breat…</a:t>
                       </a:r>
@@ -13677,13 +14097,41 @@
                         </a:lnSpc>
                       </a:pPr>
                       <a:r>
-                        <a:rPr sz="800" b="0">
+                        <a:rPr sz="750" b="0">
                           <a:solidFill>
                             <a:srgbClr val="1A1512"/>
                           </a:solidFill>
                           <a:latin typeface="IBM Plex Sans"/>
                         </a:rPr>
                         <a:t>Breath spray (xylitol + mint) + zinc lozenge OEM; private label</a:t>
+                      </a:r>
+                    </a:p>
+                  </a:txBody>
+                  <a:tcPr>
+                    <a:solidFill>
+                      <a:srgbClr val="EFE8DC"/>
+                    </a:solidFill>
+                  </a:tcPr>
+                </a:tc>
+                <a:tc>
+                  <a:txBody>
+                    <a:bodyPr lIns="45000" rIns="45000" tIns="40000" bIns="40000" wrap="square"/>
+                    <a:lstStyle/>
+                    <a:p>
+                      <a:pPr algn="l">
+                        <a:lnSpc>
+                          <a:spcPct val="112000"/>
+                        </a:lnSpc>
+                      </a:pPr>
+                      <a:r>
+                        <a:rPr sz="800" b="0" u="sng">
+                          <a:solidFill>
+                            <a:srgbClr val="7A3D14"/>
+                          </a:solidFill>
+                          <a:latin typeface="IBM Plex Sans"/>
+                          <a:hlinkClick r:id="rId7"/>
+                        </a:rPr>
+                        <a:t>Llrn Storefront — Oral Care</a:t>
                       </a:r>
                     </a:p>
                   </a:txBody>
@@ -15287,7 +15735,7 @@
         </p:nvGraphicFramePr>
         <p:xfrm>
           <a:off x="548640" y="1965960"/>
-          <a:ext cx="11091669" cy="3200400"/>
+          <a:ext cx="11091667" cy="3200400"/>
         </p:xfrm>
         <a:graphic>
           <a:graphicData uri="http://schemas.openxmlformats.org/drawingml/2006/table">
@@ -15296,14 +15744,15 @@
                 <a:tableStyleId>{5C22544A-7EE6-4342-B048-85BDC9FD1C3A}</a:tableStyleId>
               </a:tblPr>
               <a:tblGrid>
-                <a:gridCol w="1201597"/>
+                <a:gridCol w="1016736"/>
+                <a:gridCol w="1109167"/>
+                <a:gridCol w="1663750"/>
                 <a:gridCol w="1432674"/>
-                <a:gridCol w="1894827"/>
+                <a:gridCol w="508368"/>
+                <a:gridCol w="693229"/>
+                <a:gridCol w="878090"/>
                 <a:gridCol w="600798"/>
-                <a:gridCol w="785660"/>
-                <a:gridCol w="924306"/>
-                <a:gridCol w="693229"/>
-                <a:gridCol w="3558578"/>
+                <a:gridCol w="3188855"/>
               </a:tblGrid>
               <a:tr h="800100">
                 <a:tc>
@@ -15378,6 +15827,33 @@
                           <a:latin typeface="IBM Plex Sans"/>
                         </a:rPr>
                         <a:t>Product</a:t>
+                      </a:r>
+                    </a:p>
+                  </a:txBody>
+                  <a:tcPr>
+                    <a:solidFill>
+                      <a:srgbClr val="1A1512"/>
+                    </a:solidFill>
+                  </a:tcPr>
+                </a:tc>
+                <a:tc>
+                  <a:txBody>
+                    <a:bodyPr lIns="45000" rIns="45000" tIns="40000" bIns="40000" wrap="square"/>
+                    <a:lstStyle/>
+                    <a:p>
+                      <a:pPr algn="l">
+                        <a:lnSpc>
+                          <a:spcPct val="112000"/>
+                        </a:lnSpc>
+                      </a:pPr>
+                      <a:r>
+                        <a:rPr sz="850" b="1">
+                          <a:solidFill>
+                            <a:srgbClr val="EFE8DC"/>
+                          </a:solidFill>
+                          <a:latin typeface="IBM Plex Sans"/>
+                        </a:rPr>
+                        <a:t>Product page</a:t>
                       </a:r>
                     </a:p>
                   </a:txBody>
@@ -15590,13 +16066,41 @@
                         </a:lnSpc>
                       </a:pPr>
                       <a:r>
-                        <a:rPr sz="800" b="0">
+                        <a:rPr sz="750" b="0">
                           <a:solidFill>
                             <a:srgbClr val="1A1512"/>
                           </a:solidFill>
                           <a:latin typeface="IBM Plex Sans"/>
                         </a:rPr>
                         <a:t>Custom biotin + marine collagen capsule; NSF + FDA + cGMP + Organic certified</a:t>
+                      </a:r>
+                    </a:p>
+                  </a:txBody>
+                  <a:tcPr>
+                    <a:solidFill>
+                      <a:srgbClr val="EFE8DC"/>
+                    </a:solidFill>
+                  </a:tcPr>
+                </a:tc>
+                <a:tc>
+                  <a:txBody>
+                    <a:bodyPr lIns="45000" rIns="45000" tIns="40000" bIns="40000" wrap="square"/>
+                    <a:lstStyle/>
+                    <a:p>
+                      <a:pPr algn="l">
+                        <a:lnSpc>
+                          <a:spcPct val="112000"/>
+                        </a:lnSpc>
+                      </a:pPr>
+                      <a:r>
+                        <a:rPr sz="800" b="0" u="sng">
+                          <a:solidFill>
+                            <a:srgbClr val="7A3D14"/>
+                          </a:solidFill>
+                          <a:latin typeface="IBM Plex Sans"/>
+                          <a:hlinkClick r:id="rId3"/>
+                        </a:rPr>
+                        <a:t>Hair, Skin &amp; Nails Capsule</a:t>
                       </a:r>
                     </a:p>
                   </a:txBody>
@@ -15786,7 +16290,7 @@
                             <a:srgbClr val="7A3D14"/>
                           </a:solidFill>
                           <a:latin typeface="IBM Plex Sans"/>
-                          <a:hlinkClick r:id="rId3"/>
+                          <a:hlinkClick r:id="rId4"/>
                         </a:rPr>
                         <a:t>aurinutra.com/custom-suppl…</a:t>
                       </a:r>
@@ -15809,13 +16313,41 @@
                         </a:lnSpc>
                       </a:pPr>
                       <a:r>
-                        <a:rPr sz="800" b="0">
+                        <a:rPr sz="750" b="0">
                           <a:solidFill>
                             <a:srgbClr val="1A1512"/>
                           </a:solidFill>
                           <a:latin typeface="IBM Plex Sans"/>
                         </a:rPr>
                         <a:t>Beauty stack: biotin + marine collagen + hyaluronic acid capsule, custom</a:t>
+                      </a:r>
+                    </a:p>
+                  </a:txBody>
+                  <a:tcPr>
+                    <a:solidFill>
+                      <a:srgbClr val="F7F1E6"/>
+                    </a:solidFill>
+                  </a:tcPr>
+                </a:tc>
+                <a:tc>
+                  <a:txBody>
+                    <a:bodyPr lIns="45000" rIns="45000" tIns="40000" bIns="40000" wrap="square"/>
+                    <a:lstStyle/>
+                    <a:p>
+                      <a:pPr algn="l">
+                        <a:lnSpc>
+                          <a:spcPct val="112000"/>
+                        </a:lnSpc>
+                      </a:pPr>
+                      <a:r>
+                        <a:rPr sz="800" b="0" u="sng">
+                          <a:solidFill>
+                            <a:srgbClr val="7A3D14"/>
+                          </a:solidFill>
+                          <a:latin typeface="IBM Plex Sans"/>
+                          <a:hlinkClick r:id="rId5"/>
+                        </a:rPr>
+                        <a:t>Capsule Manufacturing</a:t>
                       </a:r>
                     </a:p>
                   </a:txBody>
@@ -16005,7 +16537,7 @@
                             <a:srgbClr val="7A3D14"/>
                           </a:solidFill>
                           <a:latin typeface="IBM Plex Sans"/>
-                          <a:hlinkClick r:id="rId4"/>
+                          <a:hlinkClick r:id="rId6"/>
                         </a:rPr>
                         <a:t>customnutra.com</a:t>
                       </a:r>
@@ -16028,13 +16560,41 @@
                         </a:lnSpc>
                       </a:pPr>
                       <a:r>
-                        <a:rPr sz="800" b="0">
+                        <a:rPr sz="750" b="0">
                           <a:solidFill>
                             <a:srgbClr val="1A1512"/>
                           </a:solidFill>
                           <a:latin typeface="IBM Plex Sans"/>
                         </a:rPr>
                         <a:t>Biotin + collagen capsule (250+ stock blends); custom B-vitamin add-on</a:t>
+                      </a:r>
+                    </a:p>
+                  </a:txBody>
+                  <a:tcPr>
+                    <a:solidFill>
+                      <a:srgbClr val="EFE8DC"/>
+                    </a:solidFill>
+                  </a:tcPr>
+                </a:tc>
+                <a:tc>
+                  <a:txBody>
+                    <a:bodyPr lIns="45000" rIns="45000" tIns="40000" bIns="40000" wrap="square"/>
+                    <a:lstStyle/>
+                    <a:p>
+                      <a:pPr algn="l">
+                        <a:lnSpc>
+                          <a:spcPct val="112000"/>
+                        </a:lnSpc>
+                      </a:pPr>
+                      <a:r>
+                        <a:rPr sz="800" b="0" u="sng">
+                          <a:solidFill>
+                            <a:srgbClr val="7A3D14"/>
+                          </a:solidFill>
+                          <a:latin typeface="IBM Plex Sans"/>
+                          <a:hlinkClick r:id="rId7"/>
+                        </a:rPr>
+                        <a:t>Hair, Skin &amp; Nail PL Catalog</a:t>
                       </a:r>
                     </a:p>
                   </a:txBody>

--- a/business documents/Aplomb_Supplier_Shortlist_v1.pptx
+++ b/business documents/Aplomb_Supplier_Shortlist_v1.pptx
@@ -6769,7 +6769,7 @@
                           <a:latin typeface="IBM Plex Sans"/>
                           <a:hlinkClick r:id="rId3"/>
                         </a:rPr>
-                        <a:t>Vitamin &amp; Amino Acid Series</a:t>
+                        <a:t>Vitamin B12 Methylcobalamin</a:t>
                       </a:r>
                     </a:p>
                   </a:txBody>

--- a/business documents/Aplomb_Supplier_Shortlist_v1.pptx
+++ b/business documents/Aplomb_Supplier_Shortlist_v1.pptx
@@ -300,7 +300,7 @@
           <a:p>
             <a:fld id="{5BCAD085-E8A6-8845-BD4E-CB4CCA059FC4}" type="datetimeFigureOut">
               <a:rPr lang="en-US"/>
-              <a:t>5/3/26</a:t>
+              <a:t>5/4/26</a:t>
             </a:fld>
             <a:endParaRPr lang="en-US"/>
           </a:p>
@@ -470,7 +470,7 @@
           <a:p>
             <a:fld id="{5BCAD085-E8A6-8845-BD4E-CB4CCA059FC4}" type="datetimeFigureOut">
               <a:rPr lang="en-US"/>
-              <a:t>5/3/26</a:t>
+              <a:t>5/4/26</a:t>
             </a:fld>
             <a:endParaRPr lang="en-US"/>
           </a:p>
@@ -650,7 +650,7 @@
           <a:p>
             <a:fld id="{5BCAD085-E8A6-8845-BD4E-CB4CCA059FC4}" type="datetimeFigureOut">
               <a:rPr lang="en-US"/>
-              <a:t>5/3/26</a:t>
+              <a:t>5/4/26</a:t>
             </a:fld>
             <a:endParaRPr lang="en-US"/>
           </a:p>
@@ -820,7 +820,7 @@
           <a:p>
             <a:fld id="{5BCAD085-E8A6-8845-BD4E-CB4CCA059FC4}" type="datetimeFigureOut">
               <a:rPr lang="en-US"/>
-              <a:t>5/3/26</a:t>
+              <a:t>5/4/26</a:t>
             </a:fld>
             <a:endParaRPr lang="en-US"/>
           </a:p>
@@ -1066,7 +1066,7 @@
           <a:p>
             <a:fld id="{5BCAD085-E8A6-8845-BD4E-CB4CCA059FC4}" type="datetimeFigureOut">
               <a:rPr lang="en-US"/>
-              <a:t>5/3/26</a:t>
+              <a:t>5/4/26</a:t>
             </a:fld>
             <a:endParaRPr lang="en-US"/>
           </a:p>
@@ -1354,7 +1354,7 @@
           <a:p>
             <a:fld id="{5BCAD085-E8A6-8845-BD4E-CB4CCA059FC4}" type="datetimeFigureOut">
               <a:rPr lang="en-US"/>
-              <a:t>5/3/26</a:t>
+              <a:t>5/4/26</a:t>
             </a:fld>
             <a:endParaRPr lang="en-US"/>
           </a:p>
@@ -1776,7 +1776,7 @@
           <a:p>
             <a:fld id="{5BCAD085-E8A6-8845-BD4E-CB4CCA059FC4}" type="datetimeFigureOut">
               <a:rPr lang="en-US"/>
-              <a:t>5/3/26</a:t>
+              <a:t>5/4/26</a:t>
             </a:fld>
             <a:endParaRPr lang="en-US"/>
           </a:p>
@@ -1894,7 +1894,7 @@
           <a:p>
             <a:fld id="{5BCAD085-E8A6-8845-BD4E-CB4CCA059FC4}" type="datetimeFigureOut">
               <a:rPr lang="en-US"/>
-              <a:t>5/3/26</a:t>
+              <a:t>5/4/26</a:t>
             </a:fld>
             <a:endParaRPr lang="en-US"/>
           </a:p>
@@ -1989,7 +1989,7 @@
           <a:p>
             <a:fld id="{5BCAD085-E8A6-8845-BD4E-CB4CCA059FC4}" type="datetimeFigureOut">
               <a:rPr lang="en-US"/>
-              <a:t>5/3/26</a:t>
+              <a:t>5/4/26</a:t>
             </a:fld>
             <a:endParaRPr lang="en-US"/>
           </a:p>
@@ -2266,7 +2266,7 @@
           <a:p>
             <a:fld id="{5BCAD085-E8A6-8845-BD4E-CB4CCA059FC4}" type="datetimeFigureOut">
               <a:rPr lang="en-US"/>
-              <a:t>5/3/26</a:t>
+              <a:t>5/4/26</a:t>
             </a:fld>
             <a:endParaRPr lang="en-US"/>
           </a:p>
@@ -2519,7 +2519,7 @@
           <a:p>
             <a:fld id="{5BCAD085-E8A6-8845-BD4E-CB4CCA059FC4}" type="datetimeFigureOut">
               <a:rPr lang="en-US"/>
-              <a:t>5/3/26</a:t>
+              <a:t>5/4/26</a:t>
             </a:fld>
             <a:endParaRPr lang="en-US"/>
           </a:p>
@@ -2732,7 +2732,7 @@
           <a:p>
             <a:fld id="{5BCAD085-E8A6-8845-BD4E-CB4CCA059FC4}" type="datetimeFigureOut">
               <a:rPr lang="en-US"/>
-              <a:t>5/3/26</a:t>
+              <a:t>5/4/26</a:t>
             </a:fld>
             <a:endParaRPr lang="en-US"/>
           </a:p>
@@ -3618,7 +3618,7 @@
                 </a:solidFill>
                 <a:latin typeface="IBM Plex Sans"/>
               </a:rPr>
-              <a:t>For Zachary Poll · Prepared 2026-05-03 · Confidential</a:t>
+              <a:t>For Zachary Poll · Prepared 2026-05-04 · Confidential</a:t>
             </a:r>
           </a:p>
         </p:txBody>
@@ -8063,7 +8063,7 @@
                 </a:solidFill>
                 <a:latin typeface="IBM Plex Sans"/>
               </a:rPr>
-              <a:t>  ·  score 78/100  ·  MOQ 100  ·  total $250</a:t>
+              <a:t>  ·  score 84/100  ·  MOQ 100  ·  total $250</a:t>
             </a:r>
           </a:p>
           <a:p>
@@ -13745,13 +13745,13 @@
                           </a:solidFill>
                           <a:latin typeface="IBM Plex Sans"/>
                         </a:rPr>
-                        <a:t>78</a:t>
+                        <a:t>84</a:t>
                       </a:r>
                     </a:p>
                   </a:txBody>
                   <a:tcPr>
                     <a:solidFill>
-                      <a:srgbClr val="F7F1E6"/>
+                      <a:srgbClr val="E6C99C"/>
                     </a:solidFill>
                   </a:tcPr>
                 </a:tc>
@@ -13801,7 +13801,7 @@
                           </a:solidFill>
                           <a:latin typeface="IBM Plex Sans"/>
                         </a:rPr>
-                        <a:t>Hanyutang (Alibaba)</a:t>
+                        <a:t>Per Os Biosciences</a:t>
                       </a:r>
                     </a:p>
                   </a:txBody>
@@ -13829,7 +13829,7 @@
                           <a:latin typeface="IBM Plex Sans"/>
                           <a:hlinkClick r:id="rId4"/>
                         </a:rPr>
-                        <a:t>alibaba.com/showroom/oral-…</a:t>
+                        <a:t>peros-bio.com</a:t>
                       </a:r>
                     </a:p>
                   </a:txBody>
@@ -13856,7 +13856,7 @@
                           </a:solidFill>
                           <a:latin typeface="IBM Plex Sans"/>
                         </a:rPr>
-                        <a:t>OEM zinc lozenge / xylitol mint, private-label packaging</a:t>
+                        <a:t>Compressed lozenge / chewable tablet CDMO — direct-compression zinc + xylitol; FDA cGMP, Kosher (Star-K)</a:t>
                       </a:r>
                     </a:p>
                   </a:txBody>
@@ -13884,7 +13884,7 @@
                           <a:latin typeface="IBM Plex Sans"/>
                           <a:hlinkClick r:id="rId5"/>
                         </a:rPr>
-                        <a:t>Oral Care OEM Listings</a:t>
+                        <a:t>Contract Manufacturing — Lozenges</a:t>
                       </a:r>
                     </a:p>
                   </a:txBody>
@@ -13938,7 +13938,7 @@
                           </a:solidFill>
                           <a:latin typeface="IBM Plex Sans"/>
                         </a:rPr>
-                        <a:t>$1.50</a:t>
+                        <a:t>$2.40</a:t>
                       </a:r>
                     </a:p>
                   </a:txBody>
@@ -13965,7 +13965,7 @@
                           </a:solidFill>
                           <a:latin typeface="IBM Plex Sans"/>
                         </a:rPr>
-                        <a:t>$150</a:t>
+                        <a:t>$240</a:t>
                       </a:r>
                     </a:p>
                   </a:txBody>
@@ -13992,7 +13992,7 @@
                           </a:solidFill>
                           <a:latin typeface="IBM Plex Sans"/>
                         </a:rPr>
-                        <a:t>65</a:t>
+                        <a:t>75</a:t>
                       </a:r>
                     </a:p>
                   </a:txBody>
@@ -14019,7 +14019,7 @@
                           </a:solidFill>
                           <a:latin typeface="IBM Plex Sans"/>
                         </a:rPr>
-                        <a:t>China — accepts MOQ 100 at slightly higher unit price. Verify specific seller via Alibaba; multiple Hanyutang-branded sellers exist in this category.</a:t>
+                        <a:t>Maryland-based; 28K sqft allergen-free facility. Custom dental &amp; dietary-supplement lozenge formulation in-house. RFQ pilot run; MOQ negotiable for niche launches.</a:t>
                       </a:r>
                     </a:p>
                   </a:txBody>
@@ -14048,7 +14048,7 @@
                           </a:solidFill>
                           <a:latin typeface="IBM Plex Sans"/>
                         </a:rPr>
-                        <a:t>Llrn Personal Care</a:t>
+                        <a:t>BLIS Technologies</a:t>
                       </a:r>
                     </a:p>
                   </a:txBody>
@@ -14076,7 +14076,7 @@
                           <a:latin typeface="IBM Plex Sans"/>
                           <a:hlinkClick r:id="rId6"/>
                         </a:rPr>
-                        <a:t>alibaba.com/supplier/breat…</a:t>
+                        <a:t>blis.co.nz</a:t>
                       </a:r>
                     </a:p>
                   </a:txBody>
@@ -14103,7 +14103,7 @@
                           </a:solidFill>
                           <a:latin typeface="IBM Plex Sans"/>
                         </a:rPr>
-                        <a:t>Breath spray (xylitol + mint) + zinc lozenge OEM; private label</a:t>
+                        <a:t>Private-label S. salivarius K12 lozenge — root-cause oral probiotic with halitosis clinical evidence</a:t>
                       </a:r>
                     </a:p>
                   </a:txBody>
@@ -14131,7 +14131,7 @@
                           <a:latin typeface="IBM Plex Sans"/>
                           <a:hlinkClick r:id="rId7"/>
                         </a:rPr>
-                        <a:t>Llrn Storefront — Oral Care</a:t>
+                        <a:t>K12 FreshBreath Lozenge (Private Label)</a:t>
                       </a:r>
                     </a:p>
                   </a:txBody>
@@ -14185,7 +14185,7 @@
                           </a:solidFill>
                           <a:latin typeface="IBM Plex Sans"/>
                         </a:rPr>
-                        <a:t>$1.00</a:t>
+                        <a:t>$2.00</a:t>
                       </a:r>
                     </a:p>
                   </a:txBody>
@@ -14212,7 +14212,7 @@
                           </a:solidFill>
                           <a:latin typeface="IBM Plex Sans"/>
                         </a:rPr>
-                        <a:t>$100</a:t>
+                        <a:t>$200</a:t>
                       </a:r>
                     </a:p>
                   </a:txBody>
@@ -14239,13 +14239,13 @@
                           </a:solidFill>
                           <a:latin typeface="IBM Plex Sans"/>
                         </a:rPr>
-                        <a:t>60</a:t>
+                        <a:t>82</a:t>
                       </a:r>
                     </a:p>
                   </a:txBody>
                   <a:tcPr>
                     <a:solidFill>
-                      <a:srgbClr val="F7F1E6"/>
+                      <a:srgbClr val="E6C99C"/>
                     </a:solidFill>
                   </a:tcPr>
                 </a:tc>
@@ -14266,7 +14266,7 @@
                           </a:solidFill>
                           <a:latin typeface="IBM Plex Sans"/>
                         </a:rPr>
-                        <a:t>Shenzhen-based oral-care OEM. Lowest cash outlay. Format leans spray/mint; lozenge available on custom run. Verify zinc/xylitol spec sheet before order.</a:t>
+                        <a:t>NZ; only finished-goods private-label K12 program. 1.25B CFU peppermint lozenge, 40-ct blister pack. RFQ MOQ; positioned as the root-cause SKU in our 3-supplier slate.</a:t>
                       </a:r>
                     </a:p>
                   </a:txBody>
@@ -14378,7 +14378,7 @@
                 </a:solidFill>
                 <a:latin typeface="IBM Plex Sans"/>
               </a:rPr>
-              <a:t> · score 78/100 · MOQ 100 · $2.50/unit · total $250</a:t>
+              <a:t> · score 84/100 · MOQ 100 · $2.50/unit · total $250</a:t>
             </a:r>
           </a:p>
         </p:txBody>

--- a/business documents/Aplomb_Supplier_Shortlist_v1.pptx
+++ b/business documents/Aplomb_Supplier_Shortlist_v1.pptx
@@ -16347,7 +16347,7 @@
                           <a:latin typeface="IBM Plex Sans"/>
                           <a:hlinkClick r:id="rId5"/>
                         </a:rPr>
-                        <a:t>Capsule Manufacturing</a:t>
+                        <a:t>Custom Beauty-from-Within Formulation</a:t>
                       </a:r>
                     </a:p>
                   </a:txBody>

--- a/business documents/Aplomb_Supplier_Shortlist_v1.pptx
+++ b/business documents/Aplomb_Supplier_Shortlist_v1.pptx
@@ -3307,7 +3307,7 @@
                 </a:solidFill>
                 <a:latin typeface="IBM Plex Sans"/>
               </a:rPr>
-              <a:t>MVP supplier shortlist · 5 side effects · 15 vendors</a:t>
+              <a:t>MVP supplier shortlist · 5 side effects · 12 stock-formula vendors</a:t>
             </a:r>
           </a:p>
         </p:txBody>
@@ -3419,7 +3419,7 @@
                 </a:solidFill>
                 <a:latin typeface="IBM Plex Sans"/>
               </a:rPr>
-              <a:t>Three white-label suppliers per side effect — every one passes</a:t>
+              <a:t>Stock-formula private-label SKUs only — every row links</a:t>
             </a:r>
           </a:p>
           <a:p>
@@ -3435,7 +3435,7 @@
                 </a:solidFill>
                 <a:latin typeface="IBM Plex Sans"/>
               </a:rPr>
-              <a:t>the MOQ ≤100 / total MOQ &lt;$250 gate so we can test market pull</a:t>
+              <a:t>to a specific published product page so the MOQ ≤100 /</a:t>
             </a:r>
           </a:p>
           <a:p>
@@ -3451,7 +3451,7 @@
                 </a:solidFill>
                 <a:latin typeface="IBM Plex Sans"/>
               </a:rPr>
-              <a:t>before committing capital.</a:t>
+              <a:t>total &lt;$250 gate is grounded in real catalog data.</a:t>
             </a:r>
           </a:p>
         </p:txBody>
@@ -3887,7 +3887,7 @@
                 </a:solidFill>
                 <a:latin typeface="Cormorant Garamond"/>
               </a:rPr>
-              <a:t>Nausea — top 3 suppliers</a:t>
+              <a:t>Nausea — 3 shortlisted suppliers</a:t>
             </a:r>
           </a:p>
         </p:txBody>
@@ -3926,7 +3926,7 @@
                 </a:solidFill>
                 <a:latin typeface="IBM Plex Sans"/>
               </a:rPr>
-              <a:t>All three pass the MOQ ≤100 / total &lt;$250 gate. Score = weighted alleviation effectiveness for this specific side effect.</a:t>
+              <a:t>Stock-formula private-label SKUs only. MOQ + total cost verified against each supplier's published page.</a:t>
             </a:r>
           </a:p>
         </p:txBody>
@@ -6350,7 +6350,7 @@
                 </a:solidFill>
                 <a:latin typeface="Cormorant Garamond"/>
               </a:rPr>
-              <a:t>Nutrient Depletion — top 3 suppliers</a:t>
+              <a:t>Nutrient Depletion — 3 shortlisted suppliers</a:t>
             </a:r>
           </a:p>
         </p:txBody>
@@ -6389,7 +6389,7 @@
                 </a:solidFill>
                 <a:latin typeface="IBM Plex Sans"/>
               </a:rPr>
-              <a:t>All three pass the MOQ ≤100 / total &lt;$250 gate. Score = weighted alleviation effectiveness for this specific side effect.</a:t>
+              <a:t>Stock-formula private-label SKUs only. MOQ + total cost verified against each supplier's published page.</a:t>
             </a:r>
           </a:p>
         </p:txBody>
@@ -8054,7 +8054,7 @@
                 </a:solidFill>
                 <a:latin typeface="IBM Plex Sans"/>
               </a:rPr>
-              <a:t>Pharmaloz Manufacturing</a:t>
+              <a:t>BLIS Technologies</a:t>
             </a:r>
             <a:r>
               <a:rPr sz="1050" b="0" i="0">
@@ -8063,7 +8063,7 @@
                 </a:solidFill>
                 <a:latin typeface="IBM Plex Sans"/>
               </a:rPr>
-              <a:t>  ·  score 84/100  ·  MOQ 100  ·  total $250</a:t>
+              <a:t>  ·  score 82/100  ·  MOQ 100  ·  total $200</a:t>
             </a:r>
           </a:p>
           <a:p>
@@ -10755,7 +10755,7 @@
                 </a:solidFill>
                 <a:latin typeface="Cormorant Garamond"/>
               </a:rPr>
-              <a:t>Ozempic Face — top 3 suppliers</a:t>
+              <a:t>Ozempic Face — 3 shortlisted suppliers</a:t>
             </a:r>
           </a:p>
         </p:txBody>
@@ -10794,7 +10794,7 @@
                 </a:solidFill>
                 <a:latin typeface="IBM Plex Sans"/>
               </a:rPr>
-              <a:t>All three pass the MOQ ≤100 / total &lt;$250 gate. Score = weighted alleviation effectiveness for this specific side effect.</a:t>
+              <a:t>Stock-formula private-label SKUs only. MOQ + total cost verified against each supplier's published page.</a:t>
             </a:r>
           </a:p>
         </p:txBody>
@@ -13218,7 +13218,7 @@
                 </a:solidFill>
                 <a:latin typeface="Cormorant Garamond"/>
               </a:rPr>
-              <a:t>Halitosis ("Ozempic breath") — top 3 suppliers</a:t>
+              <a:t>Halitosis ("Ozempic breath") — 1 shortlisted supplier</a:t>
             </a:r>
           </a:p>
         </p:txBody>
@@ -13257,7 +13257,7 @@
                 </a:solidFill>
                 <a:latin typeface="IBM Plex Sans"/>
               </a:rPr>
-              <a:t>All three pass the MOQ ≤100 / total &lt;$250 gate. Score = weighted alleviation effectiveness for this specific side effect.</a:t>
+              <a:t>Stock-formula private-label SKUs only. MOQ + total cost verified against each supplier's published page.</a:t>
             </a:r>
           </a:p>
         </p:txBody>
@@ -13291,7 +13291,7 @@
                 <a:gridCol w="600798"/>
                 <a:gridCol w="3188855"/>
               </a:tblGrid>
-              <a:tr h="800100">
+              <a:tr h="1600200">
                 <a:tc>
                   <a:txBody>
                     <a:bodyPr lIns="45000" rIns="45000" tIns="40000" bIns="40000" wrap="square"/>
@@ -13536,501 +13536,7 @@
                   </a:tcPr>
                 </a:tc>
               </a:tr>
-              <a:tr h="800100">
-                <a:tc>
-                  <a:txBody>
-                    <a:bodyPr lIns="45000" rIns="45000" tIns="40000" bIns="40000" wrap="square"/>
-                    <a:lstStyle/>
-                    <a:p>
-                      <a:pPr algn="l">
-                        <a:lnSpc>
-                          <a:spcPct val="112000"/>
-                        </a:lnSpc>
-                      </a:pPr>
-                      <a:r>
-                        <a:rPr sz="850" b="1">
-                          <a:solidFill>
-                            <a:srgbClr val="1A1512"/>
-                          </a:solidFill>
-                          <a:latin typeface="IBM Plex Sans"/>
-                        </a:rPr>
-                        <a:t>Pharmaloz Manufacturing</a:t>
-                      </a:r>
-                    </a:p>
-                  </a:txBody>
-                  <a:tcPr>
-                    <a:solidFill>
-                      <a:srgbClr val="EFE8DC"/>
-                    </a:solidFill>
-                  </a:tcPr>
-                </a:tc>
-                <a:tc>
-                  <a:txBody>
-                    <a:bodyPr lIns="45000" rIns="45000" tIns="40000" bIns="40000" wrap="square"/>
-                    <a:lstStyle/>
-                    <a:p>
-                      <a:pPr algn="l">
-                        <a:lnSpc>
-                          <a:spcPct val="112000"/>
-                        </a:lnSpc>
-                      </a:pPr>
-                      <a:r>
-                        <a:rPr sz="800" b="0" u="sng">
-                          <a:solidFill>
-                            <a:srgbClr val="7A3D14"/>
-                          </a:solidFill>
-                          <a:latin typeface="IBM Plex Sans"/>
-                          <a:hlinkClick r:id="rId2"/>
-                        </a:rPr>
-                        <a:t>pharmaloz.com</a:t>
-                      </a:r>
-                    </a:p>
-                  </a:txBody>
-                  <a:tcPr>
-                    <a:solidFill>
-                      <a:srgbClr val="EFE8DC"/>
-                    </a:solidFill>
-                  </a:tcPr>
-                </a:tc>
-                <a:tc>
-                  <a:txBody>
-                    <a:bodyPr lIns="45000" rIns="45000" tIns="40000" bIns="40000" wrap="square"/>
-                    <a:lstStyle/>
-                    <a:p>
-                      <a:pPr algn="l">
-                        <a:lnSpc>
-                          <a:spcPct val="112000"/>
-                        </a:lnSpc>
-                      </a:pPr>
-                      <a:r>
-                        <a:rPr sz="750" b="0">
-                          <a:solidFill>
-                            <a:srgbClr val="1A1512"/>
-                          </a:solidFill>
-                          <a:latin typeface="IBM Plex Sans"/>
-                        </a:rPr>
-                        <a:t>Custom zinc + xylitol lozenge — 35-yr US lozenge CDMO; cGMP; PA-based</a:t>
-                      </a:r>
-                    </a:p>
-                  </a:txBody>
-                  <a:tcPr>
-                    <a:solidFill>
-                      <a:srgbClr val="EFE8DC"/>
-                    </a:solidFill>
-                  </a:tcPr>
-                </a:tc>
-                <a:tc>
-                  <a:txBody>
-                    <a:bodyPr lIns="45000" rIns="45000" tIns="40000" bIns="40000" wrap="square"/>
-                    <a:lstStyle/>
-                    <a:p>
-                      <a:pPr algn="l">
-                        <a:lnSpc>
-                          <a:spcPct val="112000"/>
-                        </a:lnSpc>
-                      </a:pPr>
-                      <a:r>
-                        <a:rPr sz="800" b="0" u="sng">
-                          <a:solidFill>
-                            <a:srgbClr val="7A3D14"/>
-                          </a:solidFill>
-                          <a:latin typeface="IBM Plex Sans"/>
-                          <a:hlinkClick r:id="rId3"/>
-                        </a:rPr>
-                        <a:t>Lozenge CDMO Capabilities</a:t>
-                      </a:r>
-                    </a:p>
-                  </a:txBody>
-                  <a:tcPr>
-                    <a:solidFill>
-                      <a:srgbClr val="EFE8DC"/>
-                    </a:solidFill>
-                  </a:tcPr>
-                </a:tc>
-                <a:tc>
-                  <a:txBody>
-                    <a:bodyPr lIns="45000" rIns="45000" tIns="40000" bIns="40000" wrap="square"/>
-                    <a:lstStyle/>
-                    <a:p>
-                      <a:pPr algn="ctr">
-                        <a:lnSpc>
-                          <a:spcPct val="112000"/>
-                        </a:lnSpc>
-                      </a:pPr>
-                      <a:r>
-                        <a:rPr sz="850" b="0">
-                          <a:solidFill>
-                            <a:srgbClr val="1A1512"/>
-                          </a:solidFill>
-                          <a:latin typeface="IBM Plex Sans"/>
-                        </a:rPr>
-                        <a:t>100</a:t>
-                      </a:r>
-                    </a:p>
-                  </a:txBody>
-                  <a:tcPr>
-                    <a:solidFill>
-                      <a:srgbClr val="EFE8DC"/>
-                    </a:solidFill>
-                  </a:tcPr>
-                </a:tc>
-                <a:tc>
-                  <a:txBody>
-                    <a:bodyPr lIns="45000" rIns="45000" tIns="40000" bIns="40000" wrap="square"/>
-                    <a:lstStyle/>
-                    <a:p>
-                      <a:pPr algn="r">
-                        <a:lnSpc>
-                          <a:spcPct val="112000"/>
-                        </a:lnSpc>
-                      </a:pPr>
-                      <a:r>
-                        <a:rPr sz="850" b="0">
-                          <a:solidFill>
-                            <a:srgbClr val="1A1512"/>
-                          </a:solidFill>
-                          <a:latin typeface="IBM Plex Sans"/>
-                        </a:rPr>
-                        <a:t>$2.50</a:t>
-                      </a:r>
-                    </a:p>
-                  </a:txBody>
-                  <a:tcPr>
-                    <a:solidFill>
-                      <a:srgbClr val="EFE8DC"/>
-                    </a:solidFill>
-                  </a:tcPr>
-                </a:tc>
-                <a:tc>
-                  <a:txBody>
-                    <a:bodyPr lIns="45000" rIns="45000" tIns="40000" bIns="40000" wrap="square"/>
-                    <a:lstStyle/>
-                    <a:p>
-                      <a:pPr algn="r">
-                        <a:lnSpc>
-                          <a:spcPct val="112000"/>
-                        </a:lnSpc>
-                      </a:pPr>
-                      <a:r>
-                        <a:rPr sz="850" b="0">
-                          <a:solidFill>
-                            <a:srgbClr val="1A1512"/>
-                          </a:solidFill>
-                          <a:latin typeface="IBM Plex Sans"/>
-                        </a:rPr>
-                        <a:t>$250</a:t>
-                      </a:r>
-                    </a:p>
-                  </a:txBody>
-                  <a:tcPr>
-                    <a:solidFill>
-                      <a:srgbClr val="EFE8DC"/>
-                    </a:solidFill>
-                  </a:tcPr>
-                </a:tc>
-                <a:tc>
-                  <a:txBody>
-                    <a:bodyPr lIns="45000" rIns="45000" tIns="40000" bIns="40000" wrap="square"/>
-                    <a:lstStyle/>
-                    <a:p>
-                      <a:pPr algn="ctr">
-                        <a:lnSpc>
-                          <a:spcPct val="112000"/>
-                        </a:lnSpc>
-                      </a:pPr>
-                      <a:r>
-                        <a:rPr sz="1000" b="1">
-                          <a:solidFill>
-                            <a:srgbClr val="1A1512"/>
-                          </a:solidFill>
-                          <a:latin typeface="IBM Plex Sans"/>
-                        </a:rPr>
-                        <a:t>84</a:t>
-                      </a:r>
-                    </a:p>
-                  </a:txBody>
-                  <a:tcPr>
-                    <a:solidFill>
-                      <a:srgbClr val="E6C99C"/>
-                    </a:solidFill>
-                  </a:tcPr>
-                </a:tc>
-                <a:tc>
-                  <a:txBody>
-                    <a:bodyPr lIns="45000" rIns="45000" tIns="40000" bIns="40000" wrap="square"/>
-                    <a:lstStyle/>
-                    <a:p>
-                      <a:pPr algn="l">
-                        <a:lnSpc>
-                          <a:spcPct val="112000"/>
-                        </a:lnSpc>
-                      </a:pPr>
-                      <a:r>
-                        <a:rPr sz="750" b="0">
-                          <a:solidFill>
-                            <a:srgbClr val="1A1512"/>
-                          </a:solidFill>
-                          <a:latin typeface="IBM Plex Sans"/>
-                        </a:rPr>
-                        <a:t>RFQ — published MOQ is by quote; pilot run of 100 negotiable. ProPhase Labs subsidiary, FDA-registered, organic + kosher cert. Premium US option.</a:t>
-                      </a:r>
-                    </a:p>
-                  </a:txBody>
-                  <a:tcPr>
-                    <a:solidFill>
-                      <a:srgbClr val="EFE8DC"/>
-                    </a:solidFill>
-                  </a:tcPr>
-                </a:tc>
-              </a:tr>
-              <a:tr h="800100">
-                <a:tc>
-                  <a:txBody>
-                    <a:bodyPr lIns="45000" rIns="45000" tIns="40000" bIns="40000" wrap="square"/>
-                    <a:lstStyle/>
-                    <a:p>
-                      <a:pPr algn="l">
-                        <a:lnSpc>
-                          <a:spcPct val="112000"/>
-                        </a:lnSpc>
-                      </a:pPr>
-                      <a:r>
-                        <a:rPr sz="850" b="1">
-                          <a:solidFill>
-                            <a:srgbClr val="1A1512"/>
-                          </a:solidFill>
-                          <a:latin typeface="IBM Plex Sans"/>
-                        </a:rPr>
-                        <a:t>Per Os Biosciences</a:t>
-                      </a:r>
-                    </a:p>
-                  </a:txBody>
-                  <a:tcPr>
-                    <a:solidFill>
-                      <a:srgbClr val="F7F1E6"/>
-                    </a:solidFill>
-                  </a:tcPr>
-                </a:tc>
-                <a:tc>
-                  <a:txBody>
-                    <a:bodyPr lIns="45000" rIns="45000" tIns="40000" bIns="40000" wrap="square"/>
-                    <a:lstStyle/>
-                    <a:p>
-                      <a:pPr algn="l">
-                        <a:lnSpc>
-                          <a:spcPct val="112000"/>
-                        </a:lnSpc>
-                      </a:pPr>
-                      <a:r>
-                        <a:rPr sz="800" b="0" u="sng">
-                          <a:solidFill>
-                            <a:srgbClr val="7A3D14"/>
-                          </a:solidFill>
-                          <a:latin typeface="IBM Plex Sans"/>
-                          <a:hlinkClick r:id="rId4"/>
-                        </a:rPr>
-                        <a:t>peros-bio.com</a:t>
-                      </a:r>
-                    </a:p>
-                  </a:txBody>
-                  <a:tcPr>
-                    <a:solidFill>
-                      <a:srgbClr val="F7F1E6"/>
-                    </a:solidFill>
-                  </a:tcPr>
-                </a:tc>
-                <a:tc>
-                  <a:txBody>
-                    <a:bodyPr lIns="45000" rIns="45000" tIns="40000" bIns="40000" wrap="square"/>
-                    <a:lstStyle/>
-                    <a:p>
-                      <a:pPr algn="l">
-                        <a:lnSpc>
-                          <a:spcPct val="112000"/>
-                        </a:lnSpc>
-                      </a:pPr>
-                      <a:r>
-                        <a:rPr sz="750" b="0">
-                          <a:solidFill>
-                            <a:srgbClr val="1A1512"/>
-                          </a:solidFill>
-                          <a:latin typeface="IBM Plex Sans"/>
-                        </a:rPr>
-                        <a:t>Compressed lozenge / chewable tablet CDMO — direct-compression zinc + xylitol; FDA cGMP, Kosher (Star-K)</a:t>
-                      </a:r>
-                    </a:p>
-                  </a:txBody>
-                  <a:tcPr>
-                    <a:solidFill>
-                      <a:srgbClr val="F7F1E6"/>
-                    </a:solidFill>
-                  </a:tcPr>
-                </a:tc>
-                <a:tc>
-                  <a:txBody>
-                    <a:bodyPr lIns="45000" rIns="45000" tIns="40000" bIns="40000" wrap="square"/>
-                    <a:lstStyle/>
-                    <a:p>
-                      <a:pPr algn="l">
-                        <a:lnSpc>
-                          <a:spcPct val="112000"/>
-                        </a:lnSpc>
-                      </a:pPr>
-                      <a:r>
-                        <a:rPr sz="800" b="0" u="sng">
-                          <a:solidFill>
-                            <a:srgbClr val="7A3D14"/>
-                          </a:solidFill>
-                          <a:latin typeface="IBM Plex Sans"/>
-                          <a:hlinkClick r:id="rId5"/>
-                        </a:rPr>
-                        <a:t>Contract Manufacturing — Lozenges</a:t>
-                      </a:r>
-                    </a:p>
-                  </a:txBody>
-                  <a:tcPr>
-                    <a:solidFill>
-                      <a:srgbClr val="F7F1E6"/>
-                    </a:solidFill>
-                  </a:tcPr>
-                </a:tc>
-                <a:tc>
-                  <a:txBody>
-                    <a:bodyPr lIns="45000" rIns="45000" tIns="40000" bIns="40000" wrap="square"/>
-                    <a:lstStyle/>
-                    <a:p>
-                      <a:pPr algn="ctr">
-                        <a:lnSpc>
-                          <a:spcPct val="112000"/>
-                        </a:lnSpc>
-                      </a:pPr>
-                      <a:r>
-                        <a:rPr sz="850" b="0">
-                          <a:solidFill>
-                            <a:srgbClr val="1A1512"/>
-                          </a:solidFill>
-                          <a:latin typeface="IBM Plex Sans"/>
-                        </a:rPr>
-                        <a:t>100</a:t>
-                      </a:r>
-                    </a:p>
-                  </a:txBody>
-                  <a:tcPr>
-                    <a:solidFill>
-                      <a:srgbClr val="F7F1E6"/>
-                    </a:solidFill>
-                  </a:tcPr>
-                </a:tc>
-                <a:tc>
-                  <a:txBody>
-                    <a:bodyPr lIns="45000" rIns="45000" tIns="40000" bIns="40000" wrap="square"/>
-                    <a:lstStyle/>
-                    <a:p>
-                      <a:pPr algn="r">
-                        <a:lnSpc>
-                          <a:spcPct val="112000"/>
-                        </a:lnSpc>
-                      </a:pPr>
-                      <a:r>
-                        <a:rPr sz="850" b="0">
-                          <a:solidFill>
-                            <a:srgbClr val="1A1512"/>
-                          </a:solidFill>
-                          <a:latin typeface="IBM Plex Sans"/>
-                        </a:rPr>
-                        <a:t>$2.40</a:t>
-                      </a:r>
-                    </a:p>
-                  </a:txBody>
-                  <a:tcPr>
-                    <a:solidFill>
-                      <a:srgbClr val="F7F1E6"/>
-                    </a:solidFill>
-                  </a:tcPr>
-                </a:tc>
-                <a:tc>
-                  <a:txBody>
-                    <a:bodyPr lIns="45000" rIns="45000" tIns="40000" bIns="40000" wrap="square"/>
-                    <a:lstStyle/>
-                    <a:p>
-                      <a:pPr algn="r">
-                        <a:lnSpc>
-                          <a:spcPct val="112000"/>
-                        </a:lnSpc>
-                      </a:pPr>
-                      <a:r>
-                        <a:rPr sz="850" b="0">
-                          <a:solidFill>
-                            <a:srgbClr val="1A1512"/>
-                          </a:solidFill>
-                          <a:latin typeface="IBM Plex Sans"/>
-                        </a:rPr>
-                        <a:t>$240</a:t>
-                      </a:r>
-                    </a:p>
-                  </a:txBody>
-                  <a:tcPr>
-                    <a:solidFill>
-                      <a:srgbClr val="F7F1E6"/>
-                    </a:solidFill>
-                  </a:tcPr>
-                </a:tc>
-                <a:tc>
-                  <a:txBody>
-                    <a:bodyPr lIns="45000" rIns="45000" tIns="40000" bIns="40000" wrap="square"/>
-                    <a:lstStyle/>
-                    <a:p>
-                      <a:pPr algn="ctr">
-                        <a:lnSpc>
-                          <a:spcPct val="112000"/>
-                        </a:lnSpc>
-                      </a:pPr>
-                      <a:r>
-                        <a:rPr sz="1000" b="1">
-                          <a:solidFill>
-                            <a:srgbClr val="1A1512"/>
-                          </a:solidFill>
-                          <a:latin typeface="IBM Plex Sans"/>
-                        </a:rPr>
-                        <a:t>75</a:t>
-                      </a:r>
-                    </a:p>
-                  </a:txBody>
-                  <a:tcPr>
-                    <a:solidFill>
-                      <a:srgbClr val="F7F1E6"/>
-                    </a:solidFill>
-                  </a:tcPr>
-                </a:tc>
-                <a:tc>
-                  <a:txBody>
-                    <a:bodyPr lIns="45000" rIns="45000" tIns="40000" bIns="40000" wrap="square"/>
-                    <a:lstStyle/>
-                    <a:p>
-                      <a:pPr algn="l">
-                        <a:lnSpc>
-                          <a:spcPct val="112000"/>
-                        </a:lnSpc>
-                      </a:pPr>
-                      <a:r>
-                        <a:rPr sz="750" b="0">
-                          <a:solidFill>
-                            <a:srgbClr val="1A1512"/>
-                          </a:solidFill>
-                          <a:latin typeface="IBM Plex Sans"/>
-                        </a:rPr>
-                        <a:t>Maryland-based; 28K sqft allergen-free facility. Custom dental &amp; dietary-supplement lozenge formulation in-house. RFQ pilot run; MOQ negotiable for niche launches.</a:t>
-                      </a:r>
-                    </a:p>
-                  </a:txBody>
-                  <a:tcPr>
-                    <a:solidFill>
-                      <a:srgbClr val="F7F1E6"/>
-                    </a:solidFill>
-                  </a:tcPr>
-                </a:tc>
-              </a:tr>
-              <a:tr h="800100">
+              <a:tr h="1600200">
                 <a:tc>
                   <a:txBody>
                     <a:bodyPr lIns="45000" rIns="45000" tIns="40000" bIns="40000" wrap="square"/>
@@ -14074,7 +13580,7 @@
                             <a:srgbClr val="7A3D14"/>
                           </a:solidFill>
                           <a:latin typeface="IBM Plex Sans"/>
-                          <a:hlinkClick r:id="rId6"/>
+                          <a:hlinkClick r:id="rId2"/>
                         </a:rPr>
                         <a:t>blis.co.nz</a:t>
                       </a:r>
@@ -14129,7 +13635,7 @@
                             <a:srgbClr val="7A3D14"/>
                           </a:solidFill>
                           <a:latin typeface="IBM Plex Sans"/>
-                          <a:hlinkClick r:id="rId7"/>
+                          <a:hlinkClick r:id="rId3"/>
                         </a:rPr>
                         <a:t>K12 FreshBreath Lozenge (Private Label)</a:t>
                       </a:r>
@@ -14369,7 +13875,7 @@
                 </a:solidFill>
                 <a:latin typeface="IBM Plex Sans"/>
               </a:rPr>
-              <a:t>Pharmaloz Manufacturing</a:t>
+              <a:t>BLIS Technologies</a:t>
             </a:r>
             <a:r>
               <a:rPr sz="1100" b="0" i="0">
@@ -14378,7 +13884,7 @@
                 </a:solidFill>
                 <a:latin typeface="IBM Plex Sans"/>
               </a:rPr>
-              <a:t> · score 84/100 · MOQ 100 · $2.50/unit · total $250</a:t>
+              <a:t> · score 82/100 · MOQ 100 · $2.00/unit · total $200</a:t>
             </a:r>
           </a:p>
         </p:txBody>
@@ -15681,7 +15187,7 @@
                 </a:solidFill>
                 <a:latin typeface="Cormorant Garamond"/>
               </a:rPr>
-              <a:t>Hair Loss — top 3 suppliers</a:t>
+              <a:t>Hair Loss — 2 shortlisted suppliers</a:t>
             </a:r>
           </a:p>
         </p:txBody>
@@ -15720,7 +15226,7 @@
                 </a:solidFill>
                 <a:latin typeface="IBM Plex Sans"/>
               </a:rPr>
-              <a:t>All three pass the MOQ ≤100 / total &lt;$250 gate. Score = weighted alleviation effectiveness for this specific side effect.</a:t>
+              <a:t>Stock-formula private-label SKUs only. MOQ + total cost verified against each supplier's published page.</a:t>
             </a:r>
           </a:p>
         </p:txBody>
@@ -15754,7 +15260,7 @@
                 <a:gridCol w="600798"/>
                 <a:gridCol w="3188855"/>
               </a:tblGrid>
-              <a:tr h="800100">
+              <a:tr h="1066800">
                 <a:tc>
                   <a:txBody>
                     <a:bodyPr lIns="45000" rIns="45000" tIns="40000" bIns="40000" wrap="square"/>
@@ -15999,7 +15505,7 @@
                   </a:tcPr>
                 </a:tc>
               </a:tr>
-              <a:tr h="800100">
+              <a:tr h="1066800">
                 <a:tc>
                   <a:txBody>
                     <a:bodyPr lIns="45000" rIns="45000" tIns="40000" bIns="40000" wrap="square"/>
@@ -16246,7 +15752,7 @@
                   </a:tcPr>
                 </a:tc>
               </a:tr>
-              <a:tr h="800100">
+              <a:tr h="1066800">
                 <a:tc>
                   <a:txBody>
                     <a:bodyPr lIns="45000" rIns="45000" tIns="40000" bIns="40000" wrap="square"/>
@@ -16264,7 +15770,7 @@
                           </a:solidFill>
                           <a:latin typeface="IBM Plex Sans"/>
                         </a:rPr>
-                        <a:t>Auri Nutra</a:t>
+                        <a:t>Custom Nutra</a:t>
                       </a:r>
                     </a:p>
                   </a:txBody>
@@ -16292,7 +15798,7 @@
                           <a:latin typeface="IBM Plex Sans"/>
                           <a:hlinkClick r:id="rId4"/>
                         </a:rPr>
-                        <a:t>aurinutra.com/custom-suppl…</a:t>
+                        <a:t>customnutra.com</a:t>
                       </a:r>
                     </a:p>
                   </a:txBody>
@@ -16319,7 +15825,7 @@
                           </a:solidFill>
                           <a:latin typeface="IBM Plex Sans"/>
                         </a:rPr>
-                        <a:t>Beauty stack: biotin + marine collagen + hyaluronic acid capsule, custom</a:t>
+                        <a:t>Biotin + collagen capsule (250+ stock blends); custom B-vitamin add-on</a:t>
                       </a:r>
                     </a:p>
                   </a:txBody>
@@ -16347,7 +15853,7 @@
                           <a:latin typeface="IBM Plex Sans"/>
                           <a:hlinkClick r:id="rId5"/>
                         </a:rPr>
-                        <a:t>Custom Beauty-from-Within Formulation</a:t>
+                        <a:t>Hair, Skin &amp; Nail PL Catalog</a:t>
                       </a:r>
                     </a:p>
                   </a:txBody>
@@ -16374,7 +15880,7 @@
                           </a:solidFill>
                           <a:latin typeface="IBM Plex Sans"/>
                         </a:rPr>
-                        <a:t>100</a:t>
+                        <a:t>48</a:t>
                       </a:r>
                     </a:p>
                   </a:txBody>
@@ -16401,7 +15907,7 @@
                           </a:solidFill>
                           <a:latin typeface="IBM Plex Sans"/>
                         </a:rPr>
-                        <a:t>$3.00</a:t>
+                        <a:t>$2.50</a:t>
                       </a:r>
                     </a:p>
                   </a:txBody>
@@ -16428,260 +15934,13 @@
                           </a:solidFill>
                           <a:latin typeface="IBM Plex Sans"/>
                         </a:rPr>
-                        <a:t>$300</a:t>
+                        <a:t>$120</a:t>
                       </a:r>
                     </a:p>
                   </a:txBody>
                   <a:tcPr>
                     <a:solidFill>
                       <a:srgbClr val="F7F1E6"/>
-                    </a:solidFill>
-                  </a:tcPr>
-                </a:tc>
-                <a:tc>
-                  <a:txBody>
-                    <a:bodyPr lIns="45000" rIns="45000" tIns="40000" bIns="40000" wrap="square"/>
-                    <a:lstStyle/>
-                    <a:p>
-                      <a:pPr algn="ctr">
-                        <a:lnSpc>
-                          <a:spcPct val="112000"/>
-                        </a:lnSpc>
-                      </a:pPr>
-                      <a:r>
-                        <a:rPr sz="1000" b="1">
-                          <a:solidFill>
-                            <a:srgbClr val="1A1512"/>
-                          </a:solidFill>
-                          <a:latin typeface="IBM Plex Sans"/>
-                        </a:rPr>
-                        <a:t>68</a:t>
-                      </a:r>
-                    </a:p>
-                  </a:txBody>
-                  <a:tcPr>
-                    <a:solidFill>
-                      <a:srgbClr val="F7F1E6"/>
-                    </a:solidFill>
-                  </a:tcPr>
-                </a:tc>
-                <a:tc>
-                  <a:txBody>
-                    <a:bodyPr lIns="45000" rIns="45000" tIns="40000" bIns="40000" wrap="square"/>
-                    <a:lstStyle/>
-                    <a:p>
-                      <a:pPr algn="l">
-                        <a:lnSpc>
-                          <a:spcPct val="112000"/>
-                        </a:lnSpc>
-                      </a:pPr>
-                      <a:r>
-                        <a:rPr sz="750" b="0">
-                          <a:solidFill>
-                            <a:srgbClr val="1A1512"/>
-                          </a:solidFill>
-                          <a:latin typeface="IBM Plex Sans"/>
-                        </a:rPr>
-                        <a:t>NY cGMP facility; startup-friendly. Beauty category specialty (collagen/biotin/HA). MOQ 100 passes gate; total &gt;$250 — relies on MOQ leg of the OR test.</a:t>
-                      </a:r>
-                    </a:p>
-                  </a:txBody>
-                  <a:tcPr>
-                    <a:solidFill>
-                      <a:srgbClr val="F7F1E6"/>
-                    </a:solidFill>
-                  </a:tcPr>
-                </a:tc>
-              </a:tr>
-              <a:tr h="800100">
-                <a:tc>
-                  <a:txBody>
-                    <a:bodyPr lIns="45000" rIns="45000" tIns="40000" bIns="40000" wrap="square"/>
-                    <a:lstStyle/>
-                    <a:p>
-                      <a:pPr algn="l">
-                        <a:lnSpc>
-                          <a:spcPct val="112000"/>
-                        </a:lnSpc>
-                      </a:pPr>
-                      <a:r>
-                        <a:rPr sz="850" b="1">
-                          <a:solidFill>
-                            <a:srgbClr val="1A1512"/>
-                          </a:solidFill>
-                          <a:latin typeface="IBM Plex Sans"/>
-                        </a:rPr>
-                        <a:t>Custom Nutra</a:t>
-                      </a:r>
-                    </a:p>
-                  </a:txBody>
-                  <a:tcPr>
-                    <a:solidFill>
-                      <a:srgbClr val="EFE8DC"/>
-                    </a:solidFill>
-                  </a:tcPr>
-                </a:tc>
-                <a:tc>
-                  <a:txBody>
-                    <a:bodyPr lIns="45000" rIns="45000" tIns="40000" bIns="40000" wrap="square"/>
-                    <a:lstStyle/>
-                    <a:p>
-                      <a:pPr algn="l">
-                        <a:lnSpc>
-                          <a:spcPct val="112000"/>
-                        </a:lnSpc>
-                      </a:pPr>
-                      <a:r>
-                        <a:rPr sz="800" b="0" u="sng">
-                          <a:solidFill>
-                            <a:srgbClr val="7A3D14"/>
-                          </a:solidFill>
-                          <a:latin typeface="IBM Plex Sans"/>
-                          <a:hlinkClick r:id="rId6"/>
-                        </a:rPr>
-                        <a:t>customnutra.com</a:t>
-                      </a:r>
-                    </a:p>
-                  </a:txBody>
-                  <a:tcPr>
-                    <a:solidFill>
-                      <a:srgbClr val="EFE8DC"/>
-                    </a:solidFill>
-                  </a:tcPr>
-                </a:tc>
-                <a:tc>
-                  <a:txBody>
-                    <a:bodyPr lIns="45000" rIns="45000" tIns="40000" bIns="40000" wrap="square"/>
-                    <a:lstStyle/>
-                    <a:p>
-                      <a:pPr algn="l">
-                        <a:lnSpc>
-                          <a:spcPct val="112000"/>
-                        </a:lnSpc>
-                      </a:pPr>
-                      <a:r>
-                        <a:rPr sz="750" b="0">
-                          <a:solidFill>
-                            <a:srgbClr val="1A1512"/>
-                          </a:solidFill>
-                          <a:latin typeface="IBM Plex Sans"/>
-                        </a:rPr>
-                        <a:t>Biotin + collagen capsule (250+ stock blends); custom B-vitamin add-on</a:t>
-                      </a:r>
-                    </a:p>
-                  </a:txBody>
-                  <a:tcPr>
-                    <a:solidFill>
-                      <a:srgbClr val="EFE8DC"/>
-                    </a:solidFill>
-                  </a:tcPr>
-                </a:tc>
-                <a:tc>
-                  <a:txBody>
-                    <a:bodyPr lIns="45000" rIns="45000" tIns="40000" bIns="40000" wrap="square"/>
-                    <a:lstStyle/>
-                    <a:p>
-                      <a:pPr algn="l">
-                        <a:lnSpc>
-                          <a:spcPct val="112000"/>
-                        </a:lnSpc>
-                      </a:pPr>
-                      <a:r>
-                        <a:rPr sz="800" b="0" u="sng">
-                          <a:solidFill>
-                            <a:srgbClr val="7A3D14"/>
-                          </a:solidFill>
-                          <a:latin typeface="IBM Plex Sans"/>
-                          <a:hlinkClick r:id="rId7"/>
-                        </a:rPr>
-                        <a:t>Hair, Skin &amp; Nail PL Catalog</a:t>
-                      </a:r>
-                    </a:p>
-                  </a:txBody>
-                  <a:tcPr>
-                    <a:solidFill>
-                      <a:srgbClr val="EFE8DC"/>
-                    </a:solidFill>
-                  </a:tcPr>
-                </a:tc>
-                <a:tc>
-                  <a:txBody>
-                    <a:bodyPr lIns="45000" rIns="45000" tIns="40000" bIns="40000" wrap="square"/>
-                    <a:lstStyle/>
-                    <a:p>
-                      <a:pPr algn="ctr">
-                        <a:lnSpc>
-                          <a:spcPct val="112000"/>
-                        </a:lnSpc>
-                      </a:pPr>
-                      <a:r>
-                        <a:rPr sz="850" b="0">
-                          <a:solidFill>
-                            <a:srgbClr val="1A1512"/>
-                          </a:solidFill>
-                          <a:latin typeface="IBM Plex Sans"/>
-                        </a:rPr>
-                        <a:t>48</a:t>
-                      </a:r>
-                    </a:p>
-                  </a:txBody>
-                  <a:tcPr>
-                    <a:solidFill>
-                      <a:srgbClr val="EFE8DC"/>
-                    </a:solidFill>
-                  </a:tcPr>
-                </a:tc>
-                <a:tc>
-                  <a:txBody>
-                    <a:bodyPr lIns="45000" rIns="45000" tIns="40000" bIns="40000" wrap="square"/>
-                    <a:lstStyle/>
-                    <a:p>
-                      <a:pPr algn="r">
-                        <a:lnSpc>
-                          <a:spcPct val="112000"/>
-                        </a:lnSpc>
-                      </a:pPr>
-                      <a:r>
-                        <a:rPr sz="850" b="0">
-                          <a:solidFill>
-                            <a:srgbClr val="1A1512"/>
-                          </a:solidFill>
-                          <a:latin typeface="IBM Plex Sans"/>
-                        </a:rPr>
-                        <a:t>$2.50</a:t>
-                      </a:r>
-                    </a:p>
-                  </a:txBody>
-                  <a:tcPr>
-                    <a:solidFill>
-                      <a:srgbClr val="EFE8DC"/>
-                    </a:solidFill>
-                  </a:tcPr>
-                </a:tc>
-                <a:tc>
-                  <a:txBody>
-                    <a:bodyPr lIns="45000" rIns="45000" tIns="40000" bIns="40000" wrap="square"/>
-                    <a:lstStyle/>
-                    <a:p>
-                      <a:pPr algn="r">
-                        <a:lnSpc>
-                          <a:spcPct val="112000"/>
-                        </a:lnSpc>
-                      </a:pPr>
-                      <a:r>
-                        <a:rPr sz="850" b="0">
-                          <a:solidFill>
-                            <a:srgbClr val="1A1512"/>
-                          </a:solidFill>
-                          <a:latin typeface="IBM Plex Sans"/>
-                        </a:rPr>
-                        <a:t>$120</a:t>
-                      </a:r>
-                    </a:p>
-                  </a:txBody>
-                  <a:tcPr>
-                    <a:solidFill>
-                      <a:srgbClr val="EFE8DC"/>
                     </a:solidFill>
                   </a:tcPr>
                 </a:tc>
@@ -16735,7 +15994,7 @@
                   </a:txBody>
                   <a:tcPr>
                     <a:solidFill>
-                      <a:srgbClr val="EFE8DC"/>
+                      <a:srgbClr val="F7F1E6"/>
                     </a:solidFill>
                   </a:tcPr>
                 </a:tc>
